--- a/internal_doc/00.项目管理/01.会议纪要/SequoiaDB 1.10版本回顾会议_20141103.pptx
+++ b/internal_doc/00.项目管理/01.会议纪要/SequoiaDB 1.10版本回顾会议_20141103.pptx
@@ -199,7 +199,7 @@
             <a:fld id="{AC3E46FB-0C22-4315-8E08-4C5C8B3D1168}" type="datetimeFigureOut">
               <a:rPr lang="zh-CN" altLang="en-US" smtClean="0"/>
               <a:pPr/>
-              <a:t>2014/11/3</a:t>
+              <a:t>2014/11/4</a:t>
             </a:fld>
             <a:endParaRPr lang="zh-CN" altLang="en-US"/>
           </a:p>
@@ -511,30 +511,6 @@
           </a:bodyPr>
           <a:lstStyle/>
           <a:p>
-            <a:r>
-              <a:rPr lang="zh-CN" altLang="en-US" dirty="0" smtClean="0"/>
-              <a:t>总结：</a:t>
-            </a:r>
-            <a:r>
-              <a:rPr lang="en-US" altLang="zh-CN" dirty="0" smtClean="0"/>
-              <a:t>1.10</a:t>
-            </a:r>
-            <a:r>
-              <a:rPr lang="zh-CN" altLang="en-US" dirty="0" smtClean="0"/>
-              <a:t>版本在功能开发和质量上都有大幅度提升，整体效率也得到提升。</a:t>
-            </a:r>
-            <a:r>
-              <a:rPr lang="en-US" altLang="zh-CN" dirty="0" smtClean="0"/>
-              <a:t>CI</a:t>
-            </a:r>
-            <a:r>
-              <a:rPr lang="zh-CN" altLang="en-US" dirty="0" smtClean="0"/>
-              <a:t>持继集成在版本开发的整个过程中运转正常，任何时刻的版本迭代都保证了正确性，都能达到对外发布版本的要求；测试用例的质量和稳定性大幅提升，测</a:t>
-            </a:r>
-            <a:r>
-              <a:rPr lang="zh-CN" altLang="en-US" baseline="0" dirty="0" smtClean="0"/>
-              <a:t>试方法，测试的全面性有所改善；但是，我们也发现了许多的问题：人员技能不足，进度估计不准，需求勾通交流不足等，这些是我们需要持续提升和改进的不足点，我们要巩固优秀的实践，在下一版本发扬，也要改进我们的不足，在下一版本探索新的实践，进一步提升版本质量，提升效率。</a:t>
-            </a:r>
             <a:endParaRPr lang="zh-CN" altLang="en-US" dirty="0"/>
           </a:p>
         </p:txBody>
@@ -889,19 +865,7 @@
             </a:r>
             <a:r>
               <a:rPr lang="zh-CN" altLang="en-US" b="1" dirty="0" smtClean="0"/>
-              <a:t>、</a:t>
-            </a:r>
-            <a:r>
-              <a:rPr lang="zh-CN" altLang="en-US" b="1" dirty="0" smtClean="0"/>
-              <a:t>测试维度不够，对功能理解不够深刻</a:t>
-            </a:r>
-            <a:r>
-              <a:rPr lang="zh-CN" altLang="en-US" b="1" dirty="0" smtClean="0"/>
-              <a:t>，测试方法和技巧需要加强；</a:t>
-            </a:r>
-            <a:r>
-              <a:rPr lang="zh-CN" altLang="en-US" b="1" dirty="0" smtClean="0"/>
-              <a:t>测试用例重点需要转变，需要设计复杂场景 </a:t>
+              <a:t>、测试维度不够，对功能理解不够深刻，测试方法和技巧需要加强；测试用例重点需要转变，需要设计复杂场景 </a:t>
             </a:r>
             <a:r>
               <a:rPr lang="en-US" altLang="zh-CN" dirty="0" smtClean="0"/>
@@ -3475,7 +3439,9 @@
         </p:nvSpPr>
         <p:spPr/>
         <p:txBody>
-          <a:bodyPr/>
+          <a:bodyPr>
+            <a:normAutofit lnSpcReduction="10000"/>
+          </a:bodyPr>
           <a:lstStyle/>
           <a:p>
             <a:r>
@@ -3523,7 +3489,60 @@
             <a:endParaRPr lang="en-US" altLang="zh-CN" dirty="0" smtClean="0"/>
           </a:p>
           <a:p>
-            <a:endParaRPr lang="en-US" altLang="zh-CN" dirty="0" smtClean="0"/>
+            <a:pPr lvl="1"/>
+            <a:r>
+              <a:rPr lang="en-US" altLang="zh-CN" b="1" dirty="0" smtClean="0">
+                <a:solidFill>
+                  <a:srgbClr val="000099"/>
+                </a:solidFill>
+              </a:rPr>
+              <a:t>1.10</a:t>
+            </a:r>
+            <a:r>
+              <a:rPr lang="zh-CN" altLang="en-US" b="1" dirty="0" smtClean="0">
+                <a:solidFill>
+                  <a:srgbClr val="000099"/>
+                </a:solidFill>
+              </a:rPr>
+              <a:t>版本在功能开发和质量上都有大幅度提升，整体效率也得到提升。</a:t>
+            </a:r>
+            <a:r>
+              <a:rPr lang="en-US" altLang="zh-CN" b="1" dirty="0" smtClean="0">
+                <a:solidFill>
+                  <a:srgbClr val="000099"/>
+                </a:solidFill>
+              </a:rPr>
+              <a:t>CI</a:t>
+            </a:r>
+            <a:r>
+              <a:rPr lang="zh-CN" altLang="en-US" b="1" dirty="0" smtClean="0">
+                <a:solidFill>
+                  <a:srgbClr val="000099"/>
+                </a:solidFill>
+              </a:rPr>
+              <a:t>持继集成在版本开发的整个过程中运转正常，任何时刻的版本迭代都保证了正确性，都能达到对外发布版本的要求；测试用例的质量和稳定性大幅提升，测试方法，测试的全面性有所改善；团队交流和互助逐步形成一种习惯，更体现了凝聚力。但是，我们也发现了许多的问题：人员技能不足，进度估计不准，需求勾通交流不足等，这些是我们需要持续提升和改进的不足点，我们要巩固优秀的实践，在下一版本发扬，也要改进我们的不足，在下一版本探索新的实践，进一步提升版本质量，提升效</a:t>
+            </a:r>
+            <a:r>
+              <a:rPr lang="zh-CN" altLang="en-US" b="1" dirty="0" smtClean="0">
+                <a:solidFill>
+                  <a:srgbClr val="000099"/>
+                </a:solidFill>
+              </a:rPr>
+              <a:t>率</a:t>
+            </a:r>
+            <a:r>
+              <a:rPr lang="zh-CN" altLang="en-US" b="1" dirty="0" smtClean="0">
+                <a:solidFill>
+                  <a:srgbClr val="000099"/>
+                </a:solidFill>
+              </a:rPr>
+              <a:t>。</a:t>
+            </a:r>
+            <a:endParaRPr lang="en-US" altLang="zh-CN" b="1" dirty="0" smtClean="0">
+              <a:solidFill>
+                <a:srgbClr val="000099"/>
+              </a:solidFill>
+            </a:endParaRPr>
           </a:p>
         </p:txBody>
       </p:sp>
@@ -3614,11 +3633,7 @@
             </a:r>
             <a:r>
               <a:rPr lang="zh-CN" altLang="en-US" dirty="0" smtClean="0"/>
-              <a:t>，并制订巩固措施，在下一版本继续发</a:t>
-            </a:r>
-            <a:r>
-              <a:rPr lang="zh-CN" altLang="en-US" dirty="0" smtClean="0"/>
-              <a:t>扬</a:t>
+              <a:t>，并制订巩固措施，在下一版本继续发扬</a:t>
             </a:r>
             <a:endParaRPr lang="en-US" altLang="zh-CN" dirty="0" smtClean="0"/>
           </a:p>
@@ -3792,11 +3807,7 @@
             </a:r>
             <a:r>
               <a:rPr lang="zh-CN" altLang="en-US" dirty="0" smtClean="0"/>
-              <a:t>不好的地方的改进点和点子的实施办法，并制订措施，在下一版本改进实</a:t>
-            </a:r>
-            <a:r>
-              <a:rPr lang="zh-CN" altLang="en-US" dirty="0" smtClean="0"/>
-              <a:t>施</a:t>
+              <a:t>不好的地方的改进点和点子的实施办法，并制订措施，在下一版本改进实施</a:t>
             </a:r>
             <a:endParaRPr lang="en-US" altLang="zh-CN" dirty="0" smtClean="0"/>
           </a:p>

--- a/internal_doc/00.项目管理/01.会议纪要/SequoiaDB 1.10版本回顾会议_20141103.pptx
+++ b/internal_doc/00.项目管理/01.会议纪要/SequoiaDB 1.10版本回顾会议_20141103.pptx
@@ -3520,23 +3520,7 @@
                   <a:srgbClr val="000099"/>
                 </a:solidFill>
               </a:rPr>
-              <a:t>持继集成在版本开发的整个过程中运转正常，任何时刻的版本迭代都保证了正确性，都能达到对外发布版本的要求；测试用例的质量和稳定性大幅提升，测试方法，测试的全面性有所改善；团队交流和互助逐步形成一种习惯，更体现了凝聚力。但是，我们也发现了许多的问题：人员技能不足，进度估计不准，需求勾通交流不足等，这些是我们需要持续提升和改进的不足点，我们要巩固优秀的实践，在下一版本发扬，也要改进我们的不足，在下一版本探索新的实践，进一步提升版本质量，提升效</a:t>
-            </a:r>
-            <a:r>
-              <a:rPr lang="zh-CN" altLang="en-US" b="1" dirty="0" smtClean="0">
-                <a:solidFill>
-                  <a:srgbClr val="000099"/>
-                </a:solidFill>
-              </a:rPr>
-              <a:t>率</a:t>
-            </a:r>
-            <a:r>
-              <a:rPr lang="zh-CN" altLang="en-US" b="1" dirty="0" smtClean="0">
-                <a:solidFill>
-                  <a:srgbClr val="000099"/>
-                </a:solidFill>
-              </a:rPr>
-              <a:t>。</a:t>
+              <a:t>持继集成在版本开发的整个过程中运转正常，任何时刻的版本迭代都保证了正确性，都能达到对外发布版本的要求；测试用例的质量和稳定性大幅提升，测试方法，测试的全面性有所改善；团队交流和互助逐步形成一种习惯，更体现了凝聚力。但是，我们也发现了许多的问题：人员技能不足，进度估计不准，需求勾通交流不足等，这些是我们需要持续提升和改进的不足点，我们要巩固优秀的实践，在下一版本发扬，也要改进我们的不足，在下一版本探索新的实践，进一步提升版本质量，提升效率。</a:t>
             </a:r>
             <a:endParaRPr lang="en-US" altLang="zh-CN" b="1" dirty="0" smtClean="0">
               <a:solidFill>
